--- a/decks/englit-inspector/englit-inspector_ch4_mrs-birling-and-eric.pptx
+++ b/decks/englit-inspector/englit-inspector_ch4_mrs-birling-and-eric.pptx
@@ -126,29 +126,29 @@
   <p:extLst>
     <p:ext uri="{521415D9-36F7-43E2-AB2F-B90AF26B5E84}">
       <p14:sectionLst xmlns:p14="http://schemas.microsoft.com/office/powerpoint/2010/main">
-        <p14:section name="Opening" id="{4e9a5f41-f569-88ec-a008-6d74aeba96c5}">
+        <p14:section name="Opening" id="{0e7defa4-760a-6334-6ddb-4182fe83bb64}">
           <p14:sldIdLst>
             <p14:sldId id="256"/>
           </p14:sldIdLst>
         </p14:section>
-        <p14:section name="Gate" id="{90d9b8a3-cd26-3aab-46ef-59a8d51c70ba}">
+        <p14:section name="Gate" id="{8806fae5-0860-a2ef-14f4-29d8824ef7ff}">
           <p14:sldIdLst>
             <p14:sldId id="257"/>
             <p14:sldId id="258"/>
           </p14:sldIdLst>
         </p14:section>
-        <p14:section name="Pre-teach" id="{2c56a4ac-75f9-d902-d22a-5f55c137c1bb}">
+        <p14:section name="Pre-teach" id="{793eab57-d587-238c-26af-10ce715691e2}">
           <p14:sldIdLst>
             <p14:sldId id="259"/>
           </p14:sldIdLst>
         </p14:section>
-        <p14:section name="Read-along" id="{c770cab0-0bd3-de59-3d0d-ab5ed86d02ba}">
+        <p14:section name="Read-along" id="{3046a3c5-f883-83db-7d81-ab79e56c8493}">
           <p14:sldIdLst>
             <p14:sldId id="260"/>
             <p14:sldId id="261"/>
           </p14:sldIdLst>
         </p14:section>
-        <p14:section name="Teach" id="{ac8aadaa-d1ad-c9d3-9f36-11049ea2f771}">
+        <p14:section name="Teach" id="{0dcb77b3-028e-2185-91ca-7a35ac6d7c53}">
           <p14:sldIdLst>
             <p14:sldId id="262"/>
             <p14:sldId id="263"/>
@@ -156,7 +156,7 @@
             <p14:sldId id="265"/>
           </p14:sldIdLst>
         </p14:section>
-        <p14:section name="Routes" id="{e0ac111f-020d-83af-7bf0-cf42cd3577c2}">
+        <p14:section name="Routes" id="{2b32ab5b-4d65-1cae-0a31-c6d70647b4b3}">
           <p14:sldIdLst>
             <p14:sldId id="266"/>
             <p14:sldId id="267"/>
@@ -165,12 +165,12 @@
             <p14:sldId id="270"/>
           </p14:sldIdLst>
         </p14:section>
-        <p14:section name="Close" id="{d40eb99b-103b-62e3-0de5-a5bd646ac0d2}">
+        <p14:section name="Close" id="{3f544cd3-661f-3fcf-acee-d305b267659b}">
           <p14:sldIdLst>
             <p14:sldId id="271"/>
           </p14:sldIdLst>
         </p14:section>
-        <p14:section name="Answers" id="{41e1afb0-2f77-6a82-be9c-557ba2479de9}">
+        <p14:section name="Answers" id="{fe954422-c4d8-08ad-0407-1a6e25beaccd}">
           <p14:sldIdLst>
             <p14:sldId id="272"/>
             <p14:sldId id="273"/>
@@ -1237,7 +1237,7 @@
               <a:rPr lang="en-US" dirty="0"/>
               <a:t>Exit ticket — individual, silent, on a slip or mini-whiteboard. Recall before help: no notes, no lanes, no hints. Collect before pupils leave.
 Question: What position did Mrs Birling hold in Brumley?
-Answer: D   A leading member of a women's charity committee that decided which poor women to help. Mrs Birling is a prominent member of the Brumley Women's Charity Organisation. That is where Eva, pregnant and penniless, went for help two weeks before the play, and where she was turned away.
+Answer: A   A leading member of a women's charity committee that decided which poor women to help. Mrs Birling is a prominent member of the Brumley Women's Charity Organisation. That is where Eva, pregnant and penniless, went for help two weeks before the play, and where she was turned away.
 Source of this question: gate item 1 re-asked (options rotated) — this chapter has no third quick-check module.
 The ebook also holds task 3, "Eric's part of the story", for homework or the next lesson's do now.
 Sort the slips: correct → ready to move on; incorrect → start next lesson in the pre-teach group, with the read-along and the Support lane. Same destination next time.</a:t>
@@ -1329,7 +1329,7 @@
             <a:r>
               <a:rPr lang="en-US" dirty="0"/>
               <a:t>Answers — task 1: The end of Act 2. Reveal the answer; pupils mark their own work in a different colour, then read the "why" together. Same destination for every lane, so one answer serves the whole class.
-Answer: A   Because Sheila and the audience have realised that the father is Eric, so Mrs Birling is condemning her own son without knowing it
+Answer: C   Because Sheila and the audience have realised that the father is Eric, so Mrs Birling is condemning her own son without knowing it
 Why: Mrs Birling pronounces sentence on a young man she has never met, and the audience watches her son walk in to receive it. It is the sharpest dramatic irony in the play, and it is aimed at the character who never changes.
 Ask a Support pupil to explain one step, and a Stretch pupil to share their extension.</a:t>
             </a:r>
@@ -1606,7 +1606,7 @@
             <a:r>
               <a:rPr lang="en-US" dirty="0"/>
               <a:t>Do now — retrieval. Silent, no notes, no help: recall comes before any support. Give about four minutes.
-1. What position did Mrs Birling hold in Brumley?  →  A   A leading member of a women's charity committee that decided which poor women to help
+1. What position did Mrs Birling hold in Brumley?  →  B   A leading member of a women's charity committee that decided which poor women to help
 2. Mrs Birling turned Eva away partly because the girl had given her name as Mrs ___, which Mrs Birling took as a deliberate insult.  →  Birling
 3. Eric stole about £50 from his father's firm. Eva and her workmates had asked Mr Birling for 25 shillings a week, and there were 20 shillings in a pound. How many weeks of that wage was £50?  →  40 weeks
 Circulate: who gets 3/3 (Stretch route), 2/3 (Core), 0–1 (Support)? Use this to route pupils later in the lesson.</a:t>
@@ -1698,7 +1698,7 @@
             <a:r>
               <a:rPr lang="en-US" dirty="0"/>
               <a:t>Answers — exit ticket: Exit ticket. Reveal the answer; pupils mark their own work in a different colour, then read the "why" together. Same destination for every lane, so one answer serves the whole class.
-Answer: D   A leading member of a women's charity committee that decided which poor women to help
+Answer: A   A leading member of a women's charity committee that decided which poor women to help
 Why: Mrs Birling is a prominent member of the Brumley Women's Charity Organisation. That is where Eva, pregnant and penniless, went for help two weeks before the play, and where she was turned away.
 Ask a Support pupil to explain one step, and a Stretch pupil to share their extension.</a:t>
             </a:r>
@@ -1789,7 +1789,7 @@
             <a:r>
               <a:rPr lang="en-US" dirty="0"/>
               <a:t>Answers — pupils mark their own in a different colour, then hands up for 3/3, 2/3, 1/3.
-1. A   A leading member of a women's charity committee that decided which poor women to help. Mrs Birling is a prominent member of the Brumley Women's Charity Organisation. That is where Eva, pregnant and penniless, went for help two weeks before the play, and where she was turned away.
+1. B   A leading member of a women's charity committee that decided which poor women to help. Mrs Birling is a prominent member of the Brumley Women's Charity Organisation. That is where Eva, pregnant and penniless, went for help two weeks before the play, and where she was turned away.
 2. Birling. Eva gave the name Birling, perhaps because it was the father's name. Mrs Birling took it as impertinence, and admits that it prejudiced her against the case before she had heard it.
 3. 40 weeks. £50 is 50 × 20 = 1,000 shillings. At 25 shillings a week, 1,000 ÷ 25 = 40 weeks. The money Eric took casually was most of a year's pay for the woman he took it for.
 Say the route each score points to: 3/3 Stretch, 2/3 Core, 0–1 Support. Pupils may choose to move up.</a:t>
@@ -5012,7 +5012,7 @@
                 <a:ea typeface="Calibri" pitchFamily="34" charset="-122"/>
                 <a:cs typeface="Calibri" pitchFamily="34" charset="-120"/>
               </a:rPr>
-              <a:t>Because Sheila and the audience have realised that the father is Eric, so Mrs Birling is condemning her own son without knowing it</a:t>
+              <a:t>Because Gerald returns at that moment with proof that the Inspector is a fraud</a:t>
             </a:r>
             <a:endParaRPr lang="en-US" sz="2400" dirty="0"/>
           </a:p>
@@ -5086,7 +5086,7 @@
                 <a:ea typeface="Calibri" pitchFamily="34" charset="-122"/>
                 <a:cs typeface="Calibri" pitchFamily="34" charset="-120"/>
               </a:rPr>
-              <a:t>Because Mr Birling announces that he will call the police himself</a:t>
+              <a:t>Because Sheila and the audience have realised that the father is Eric, so Mrs Birling is condemning her own son without knowing it</a:t>
             </a:r>
             <a:endParaRPr lang="en-US" sz="2400" dirty="0"/>
           </a:p>
@@ -5123,7 +5123,7 @@
                 <a:ea typeface="Calibri" pitchFamily="34" charset="-122"/>
                 <a:cs typeface="Calibri" pitchFamily="34" charset="-120"/>
               </a:rPr>
-              <a:t>Because Gerald returns at that moment with proof that the Inspector is a fraud</a:t>
+              <a:t>Because Mr Birling announces that he will call the police himself</a:t>
             </a:r>
             <a:endParaRPr lang="en-US" sz="2400" dirty="0"/>
           </a:p>
@@ -8250,7 +8250,7 @@
                 <a:ea typeface="Calibri" pitchFamily="34" charset="-122"/>
                 <a:cs typeface="Calibri" pitchFamily="34" charset="-120"/>
               </a:rPr>
-              <a:t>The owner of a dress shop</a:t>
+              <a:t>A leading member of a women's charity committee that decided which poor women to help</a:t>
             </a:r>
             <a:endParaRPr lang="en-US" sz="2400" dirty="0"/>
           </a:p>
@@ -8361,7 +8361,7 @@
                 <a:ea typeface="Calibri" pitchFamily="34" charset="-122"/>
                 <a:cs typeface="Calibri" pitchFamily="34" charset="-120"/>
               </a:rPr>
-              <a:t>A leading member of a women's charity committee that decided which poor women to help</a:t>
+              <a:t>The owner of a dress shop</a:t>
             </a:r>
             <a:endParaRPr lang="en-US" sz="2400" dirty="0"/>
           </a:p>
@@ -8746,7 +8746,7 @@
                 <a:ea typeface="Cambria" pitchFamily="34" charset="-122"/>
                 <a:cs typeface="Cambria" pitchFamily="34" charset="-120"/>
               </a:rPr>
-              <a:t>A   Because Sheila and the audience have realised that the father is Eric, so Mrs Birling is condemning her own son without knowing it</a:t>
+              <a:t>C   Because Sheila and the audience have realised that the father is Eric, so Mrs Birling is condemning her own son without knowing it</a:t>
             </a:r>
             <a:endParaRPr lang="en-US" sz="3200" dirty="0"/>
           </a:p>
@@ -10192,7 +10192,7 @@
                 <a:ea typeface="Calibri" pitchFamily="34" charset="-122"/>
                 <a:cs typeface="Calibri" pitchFamily="34" charset="-120"/>
               </a:rPr>
-              <a:t>A leading member of a women's charity committee that decided which poor women to help</a:t>
+              <a:t>The owner of a dress shop</a:t>
             </a:r>
             <a:endParaRPr lang="en-US" sz="1800" dirty="0"/>
           </a:p>
@@ -10229,7 +10229,7 @@
                 <a:ea typeface="Calibri" pitchFamily="34" charset="-122"/>
                 <a:cs typeface="Calibri" pitchFamily="34" charset="-120"/>
               </a:rPr>
-              <a:t>The owner of a dress shop</a:t>
+              <a:t>A leading member of a women's charity committee that decided which poor women to help</a:t>
             </a:r>
             <a:endParaRPr lang="en-US" sz="1800" dirty="0"/>
           </a:p>
@@ -11038,7 +11038,7 @@
                 <a:ea typeface="Cambria" pitchFamily="34" charset="-122"/>
                 <a:cs typeface="Cambria" pitchFamily="34" charset="-120"/>
               </a:rPr>
-              <a:t>D   A leading member of a women's charity committee that decided which poor women to help</a:t>
+              <a:t>A   A leading member of a women's charity committee that decided which poor women to help</a:t>
             </a:r>
             <a:endParaRPr lang="en-US" sz="1800" dirty="0"/>
           </a:p>
@@ -11559,7 +11559,7 @@
                 <a:ea typeface="Calibri" pitchFamily="34" charset="-122"/>
                 <a:cs typeface="Calibri" pitchFamily="34" charset="-120"/>
               </a:rPr>
-              <a:t>A   A leading member of a women's charity committee that decided which poor women to help</a:t>
+              <a:t>B   A leading member of a women's charity committee that decided which poor women to help</a:t>
             </a:r>
             <a:endParaRPr lang="en-US" sz="2200" dirty="0"/>
           </a:p>

--- a/decks/englit-inspector/englit-inspector_ch4_mrs-birling-and-eric.pptx
+++ b/decks/englit-inspector/englit-inspector_ch4_mrs-birling-and-eric.pptx
@@ -126,29 +126,29 @@
   <p:extLst>
     <p:ext uri="{521415D9-36F7-43E2-AB2F-B90AF26B5E84}">
       <p14:sectionLst xmlns:p14="http://schemas.microsoft.com/office/powerpoint/2010/main">
-        <p14:section name="Opening" id="{0e7defa4-760a-6334-6ddb-4182fe83bb64}">
+        <p14:section name="Opening" id="{4b809375-698f-f56c-f782-fa9404c42760}">
           <p14:sldIdLst>
             <p14:sldId id="256"/>
           </p14:sldIdLst>
         </p14:section>
-        <p14:section name="Gate" id="{8806fae5-0860-a2ef-14f4-29d8824ef7ff}">
+        <p14:section name="Gate" id="{b1865ba4-5a1f-151f-289e-4a610fa677b5}">
           <p14:sldIdLst>
             <p14:sldId id="257"/>
             <p14:sldId id="258"/>
           </p14:sldIdLst>
         </p14:section>
-        <p14:section name="Pre-teach" id="{793eab57-d587-238c-26af-10ce715691e2}">
+        <p14:section name="Pre-teach" id="{581b6280-bab2-31c9-ca05-9f9a9a786deb}">
           <p14:sldIdLst>
             <p14:sldId id="259"/>
           </p14:sldIdLst>
         </p14:section>
-        <p14:section name="Read-along" id="{3046a3c5-f883-83db-7d81-ab79e56c8493}">
+        <p14:section name="Read-along" id="{8658524c-8218-4447-3abe-09d5cc2d7f61}">
           <p14:sldIdLst>
             <p14:sldId id="260"/>
             <p14:sldId id="261"/>
           </p14:sldIdLst>
         </p14:section>
-        <p14:section name="Teach" id="{0dcb77b3-028e-2185-91ca-7a35ac6d7c53}">
+        <p14:section name="Teach" id="{0bc57572-3a2f-d2cb-137f-0827a0d5fa77}">
           <p14:sldIdLst>
             <p14:sldId id="262"/>
             <p14:sldId id="263"/>
@@ -156,7 +156,7 @@
             <p14:sldId id="265"/>
           </p14:sldIdLst>
         </p14:section>
-        <p14:section name="Routes" id="{2b32ab5b-4d65-1cae-0a31-c6d70647b4b3}">
+        <p14:section name="Routes" id="{5d3fc27b-b4b8-a4e0-fc77-d35785f8da80}">
           <p14:sldIdLst>
             <p14:sldId id="266"/>
             <p14:sldId id="267"/>
@@ -165,12 +165,12 @@
             <p14:sldId id="270"/>
           </p14:sldIdLst>
         </p14:section>
-        <p14:section name="Close" id="{3f544cd3-661f-3fcf-acee-d305b267659b}">
+        <p14:section name="Close" id="{4d52921f-ee08-d50a-b1b4-7c658dff9159}">
           <p14:sldIdLst>
             <p14:sldId id="271"/>
           </p14:sldIdLst>
         </p14:section>
-        <p14:section name="Answers" id="{fe954422-c4d8-08ad-0407-1a6e25beaccd}">
+        <p14:section name="Answers" id="{8cf577a5-377e-528e-2a9d-c44af4fabf92}">
           <p14:sldIdLst>
             <p14:sldId id="272"/>
             <p14:sldId id="273"/>
